--- a/assets/pptx/catalog-333.pptx
+++ b/assets/pptx/catalog-333.pptx
@@ -3302,7 +3302,7 @@
                 <a:ea typeface="Ebrima"/>
                 <a:cs typeface="Ebrima"/>
               </a:rPr>
-              <a:t>እግዚአብሔር ግን ሁሌም ያው ነው (2x)</a:t>
+              <a:t>እግዚአብሔር ግን ሁሌም ያው ነው 2x</a:t>
             </a:r>
           </a:p>
         </p:txBody>
@@ -3369,7 +3369,7 @@
                 <a:ea typeface="Ebrima"/>
                 <a:cs typeface="Ebrima"/>
               </a:rPr>
-              <a:t>እግዚአብሔር ግን ሁሌም ያው ነው (6x)</a:t>
+              <a:t>እግዚአብሔር ግን ሁሌም ያው ነው 6x</a:t>
             </a:r>
           </a:p>
         </p:txBody>
@@ -3472,7 +3472,7 @@
                 <a:ea typeface="Ebrima"/>
                 <a:cs typeface="Ebrima"/>
               </a:rPr>
-              <a:t>ሰው ወዶ የሾመውን ሰው ወዶ ይሸረዋል (2x)</a:t>
+              <a:t>ሰው ወዶ የሾመውን ሰው ወዶ ይሸረዋል 2x</a:t>
             </a:r>
           </a:p>
           <a:p>
@@ -3508,7 +3508,7 @@
                 <a:ea typeface="Ebrima"/>
                 <a:cs typeface="Ebrima"/>
               </a:rPr>
-              <a:t>ከዘለአለምም እስከ ዘለአለም (2x)</a:t>
+              <a:t>ከዘለአለምም እስከ ዘለአለም 2x</a:t>
             </a:r>
           </a:p>
           <a:p>
@@ -3593,7 +3593,7 @@
                 <a:ea typeface="Ebrima"/>
                 <a:cs typeface="Ebrima"/>
               </a:rPr>
-              <a:t>ህያው ነው እግዚአብሔር ህያው ነው (2x)</a:t>
+              <a:t>ህያው ነው እግዚአብሔር ህያው ነው 2x</a:t>
             </a:r>
           </a:p>
           <a:p>
@@ -3611,7 +3611,7 @@
                 <a:ea typeface="Ebrima"/>
                 <a:cs typeface="Ebrima"/>
               </a:rPr>
-              <a:t>ጌታ ነው ኢየሱስ ጌታ ነው (2x)</a:t>
+              <a:t>ጌታ ነው ኢየሱስ ጌታ ነው 2x</a:t>
             </a:r>
           </a:p>
         </p:txBody>
@@ -3750,7 +3750,7 @@
                 <a:ea typeface="Ebrima"/>
                 <a:cs typeface="Ebrima"/>
               </a:rPr>
-              <a:t>በጊዜ አይገደብ እርሱ እግዚአብሐር ነው (2x)</a:t>
+              <a:t>በጊዜ አይገደብ እርሱ እግዚአብሐር ነው 2x</a:t>
             </a:r>
           </a:p>
           <a:p>
@@ -3786,7 +3786,7 @@
                 <a:ea typeface="Ebrima"/>
                 <a:cs typeface="Ebrima"/>
               </a:rPr>
-              <a:t>ያሳልፋል እንጂ እርሱ አንደው አያልፍም (2x)</a:t>
+              <a:t>ያሳልፋል እንጂ እርሱ አንደው አያልፍም 2x</a:t>
             </a:r>
           </a:p>
           <a:p>
@@ -3871,7 +3871,7 @@
                 <a:ea typeface="Ebrima"/>
                 <a:cs typeface="Ebrima"/>
               </a:rPr>
-              <a:t>ህያው ነው እግዚአብሔር ህያው ነው (2x)</a:t>
+              <a:t>ህያው ነው እግዚአብሔር ህያው ነው 2x</a:t>
             </a:r>
           </a:p>
           <a:p>
@@ -3889,7 +3889,7 @@
                 <a:ea typeface="Ebrima"/>
                 <a:cs typeface="Ebrima"/>
               </a:rPr>
-              <a:t>ጌታ ነው ኢየሱስ ጌታ ነው (2x)</a:t>
+              <a:t>ጌታ ነው ኢየሱስ ጌታ ነው 2x</a:t>
             </a:r>
           </a:p>
         </p:txBody>
@@ -4064,7 +4064,7 @@
                 <a:ea typeface="Ebrima"/>
                 <a:cs typeface="Ebrima"/>
               </a:rPr>
-              <a:t>ግርማው የተለየ ባለ ብዙ ዝና (2x)</a:t>
+              <a:t>ግርማው የተለየ ባለ ብዙ ዝና 2x</a:t>
             </a:r>
           </a:p>
           <a:p>
@@ -4149,7 +4149,7 @@
                 <a:ea typeface="Ebrima"/>
                 <a:cs typeface="Ebrima"/>
               </a:rPr>
-              <a:t>ህያው ነው እግዚአብሔር ህያው ነው (2x)</a:t>
+              <a:t>ህያው ነው እግዚአብሔር ህያው ነው 2x</a:t>
             </a:r>
           </a:p>
           <a:p>
@@ -4167,7 +4167,7 @@
                 <a:ea typeface="Ebrima"/>
                 <a:cs typeface="Ebrima"/>
               </a:rPr>
-              <a:t>ጌታ ነው ኢየሱስ ጌታ ነው (2x)</a:t>
+              <a:t>ጌታ ነው ኢየሱስ ጌታ ነው 2x</a:t>
             </a:r>
           </a:p>
           <a:p>
@@ -4185,7 +4185,7 @@
                 <a:ea typeface="Ebrima"/>
                 <a:cs typeface="Ebrima"/>
               </a:rPr>
-              <a:t>ጌታ ነው ኢየሱስ ጌታ ነው (2x)</a:t>
+              <a:t>ጌታ ነው ኢየሱስ ጌታ ነው 2x</a:t>
             </a:r>
           </a:p>
           <a:p>
@@ -4203,7 +4203,7 @@
                 <a:ea typeface="Ebrima"/>
                 <a:cs typeface="Ebrima"/>
               </a:rPr>
-              <a:t>ህያው ነው እግዚአብሔር ህያው ነው (2x)</a:t>
+              <a:t>ህያው ነው እግዚአብሔር ህያው ነው 2x</a:t>
             </a:r>
           </a:p>
           <a:p>
@@ -4221,7 +4221,7 @@
                 <a:ea typeface="Ebrima"/>
                 <a:cs typeface="Ebrima"/>
               </a:rPr>
-              <a:t>ጌታ ነው ኢየሱስ ጌታ ነው (2x)</a:t>
+              <a:t>ጌታ ነው ኢየሱስ ጌታ ነው 2x</a:t>
             </a:r>
           </a:p>
         </p:txBody>
